--- a/p/Laduga_Ladoga.pptx
+++ b/p/Laduga_Ladoga.pptx
@@ -7,8 +7,6 @@
   <p:sldIdLst>
     <p:sldId id="256" r:id="rId2"/>
     <p:sldId id="257" r:id="rId3"/>
-    <p:sldId id="258" r:id="rId4"/>
-    <p:sldId id="259" r:id="rId5"/>
   </p:sldIdLst>
   <p:sldSz cx="12192000" cy="6858000"/>
   <p:notesSz cx="6858000" cy="9144000"/>
@@ -118,11 +116,12 @@
         <p14:section name="book_cover" id="{7ED63B14-64C1-46C4-AA36-B9B7F09E9E97}">
           <p14:sldIdLst>
             <p14:sldId id="257"/>
-            <p14:sldId id="258"/>
-            <p14:sldId id="259"/>
           </p14:sldIdLst>
         </p14:section>
       </p14:sectionLst>
+    </p:ext>
+    <p:ext uri="{EFAFB233-063F-42B5-8137-9DF3F51BA10A}">
+      <p15:sldGuideLst xmlns:p15="http://schemas.microsoft.com/office/powerpoint/2012/main"/>
     </p:ext>
   </p:extLst>
 </p:presentation>
@@ -266,7 +265,7 @@
           <a:p>
             <a:fld id="{9D986570-2C26-4E5F-9D28-4D18F9BAC427}" type="datetimeFigureOut">
               <a:rPr lang="nl-BE" smtClean="0"/>
-              <a:t>1/06/2026</a:t>
+              <a:t>8/06/2026</a:t>
             </a:fld>
             <a:endParaRPr lang="nl-BE"/>
           </a:p>
@@ -402,6 +401,9 @@
   <p:clrMapOvr>
     <a:masterClrMapping/>
   </p:clrMapOvr>
+  <p:transition spd="slow">
+    <p:cover/>
+  </p:transition>
 </p:sldLayout>
 </file>
 
@@ -514,7 +516,7 @@
           <a:p>
             <a:fld id="{9D986570-2C26-4E5F-9D28-4D18F9BAC427}" type="datetimeFigureOut">
               <a:rPr lang="nl-BE" smtClean="0"/>
-              <a:t>1/06/2026</a:t>
+              <a:t>8/06/2026</a:t>
             </a:fld>
             <a:endParaRPr lang="nl-BE"/>
           </a:p>
@@ -603,6 +605,9 @@
   <p:clrMapOvr>
     <a:masterClrMapping/>
   </p:clrMapOvr>
+  <p:transition spd="slow">
+    <p:cover/>
+  </p:transition>
 </p:sldLayout>
 </file>
 
@@ -729,7 +734,7 @@
           <a:p>
             <a:fld id="{9D986570-2C26-4E5F-9D28-4D18F9BAC427}" type="datetimeFigureOut">
               <a:rPr lang="nl-BE" smtClean="0"/>
-              <a:t>1/06/2026</a:t>
+              <a:t>8/06/2026</a:t>
             </a:fld>
             <a:endParaRPr lang="nl-BE"/>
           </a:p>
@@ -818,6 +823,9 @@
   <p:clrMapOvr>
     <a:masterClrMapping/>
   </p:clrMapOvr>
+  <p:transition spd="slow">
+    <p:cover/>
+  </p:transition>
 </p:sldLayout>
 </file>
 
@@ -930,7 +938,7 @@
           <a:p>
             <a:fld id="{9D986570-2C26-4E5F-9D28-4D18F9BAC427}" type="datetimeFigureOut">
               <a:rPr lang="nl-BE" smtClean="0"/>
-              <a:t>1/06/2026</a:t>
+              <a:t>8/06/2026</a:t>
             </a:fld>
             <a:endParaRPr lang="nl-BE"/>
           </a:p>
@@ -1040,7 +1048,7 @@
             <a:pPr algn="ctr"/>
             <a:r>
               <a:rPr lang="en-US" dirty="0"/>
-              <a:t>@LADUGA-LADOGA</a:t>
+              <a:t>@LADUGA_LADOGA</a:t>
             </a:r>
             <a:endParaRPr lang="nl-BE" dirty="0"/>
           </a:p>
@@ -1056,6 +1064,9 @@
   <p:clrMapOvr>
     <a:masterClrMapping/>
   </p:clrMapOvr>
+  <p:transition spd="slow">
+    <p:cover/>
+  </p:transition>
 </p:sldLayout>
 </file>
 
@@ -1246,7 +1257,7 @@
           <a:p>
             <a:fld id="{9D986570-2C26-4E5F-9D28-4D18F9BAC427}" type="datetimeFigureOut">
               <a:rPr lang="nl-BE" smtClean="0"/>
-              <a:t>1/06/2026</a:t>
+              <a:t>8/06/2026</a:t>
             </a:fld>
             <a:endParaRPr lang="nl-BE"/>
           </a:p>
@@ -1335,6 +1346,9 @@
   <p:clrMapOvr>
     <a:masterClrMapping/>
   </p:clrMapOvr>
+  <p:transition spd="slow">
+    <p:cover/>
+  </p:transition>
 </p:sldLayout>
 </file>
 
@@ -1514,7 +1528,7 @@
           <a:p>
             <a:fld id="{9D986570-2C26-4E5F-9D28-4D18F9BAC427}" type="datetimeFigureOut">
               <a:rPr lang="nl-BE" smtClean="0"/>
-              <a:t>1/06/2026</a:t>
+              <a:t>8/06/2026</a:t>
             </a:fld>
             <a:endParaRPr lang="nl-BE"/>
           </a:p>
@@ -1603,6 +1617,9 @@
   <p:clrMapOvr>
     <a:masterClrMapping/>
   </p:clrMapOvr>
+  <p:transition spd="slow">
+    <p:cover/>
+  </p:transition>
 </p:sldLayout>
 </file>
 
@@ -1930,7 +1947,7 @@
           <a:p>
             <a:fld id="{9D986570-2C26-4E5F-9D28-4D18F9BAC427}" type="datetimeFigureOut">
               <a:rPr lang="nl-BE" smtClean="0"/>
-              <a:t>1/06/2026</a:t>
+              <a:t>8/06/2026</a:t>
             </a:fld>
             <a:endParaRPr lang="nl-BE"/>
           </a:p>
@@ -2019,6 +2036,9 @@
   <p:clrMapOvr>
     <a:masterClrMapping/>
   </p:clrMapOvr>
+  <p:transition spd="slow">
+    <p:cover/>
+  </p:transition>
 </p:sldLayout>
 </file>
 
@@ -2079,7 +2099,7 @@
           <a:p>
             <a:fld id="{9D986570-2C26-4E5F-9D28-4D18F9BAC427}" type="datetimeFigureOut">
               <a:rPr lang="nl-BE" smtClean="0"/>
-              <a:t>1/06/2026</a:t>
+              <a:t>8/06/2026</a:t>
             </a:fld>
             <a:endParaRPr lang="nl-BE"/>
           </a:p>
@@ -2168,6 +2188,9 @@
   <p:clrMapOvr>
     <a:masterClrMapping/>
   </p:clrMapOvr>
+  <p:transition spd="slow">
+    <p:cover/>
+  </p:transition>
 </p:sldLayout>
 </file>
 
@@ -2205,7 +2228,7 @@
           <a:p>
             <a:fld id="{9D986570-2C26-4E5F-9D28-4D18F9BAC427}" type="datetimeFigureOut">
               <a:rPr lang="nl-BE" smtClean="0"/>
-              <a:t>1/06/2026</a:t>
+              <a:t>8/06/2026</a:t>
             </a:fld>
             <a:endParaRPr lang="nl-BE"/>
           </a:p>
@@ -2263,6 +2286,9 @@
   <p:clrMapOvr>
     <a:masterClrMapping/>
   </p:clrMapOvr>
+  <p:transition spd="slow">
+    <p:cover/>
+  </p:transition>
 </p:sldLayout>
 </file>
 
@@ -2456,7 +2482,7 @@
           <a:p>
             <a:fld id="{9D986570-2C26-4E5F-9D28-4D18F9BAC427}" type="datetimeFigureOut">
               <a:rPr lang="nl-BE" smtClean="0"/>
-              <a:t>1/06/2026</a:t>
+              <a:t>8/06/2026</a:t>
             </a:fld>
             <a:endParaRPr lang="nl-BE"/>
           </a:p>
@@ -2545,6 +2571,9 @@
   <p:clrMapOvr>
     <a:masterClrMapping/>
   </p:clrMapOvr>
+  <p:transition spd="slow">
+    <p:cover/>
+  </p:transition>
 </p:sldLayout>
 </file>
 
@@ -2901,7 +2930,7 @@
           <a:p>
             <a:fld id="{9D986570-2C26-4E5F-9D28-4D18F9BAC427}" type="datetimeFigureOut">
               <a:rPr lang="nl-BE" smtClean="0"/>
-              <a:t>1/06/2026</a:t>
+              <a:t>8/06/2026</a:t>
             </a:fld>
             <a:endParaRPr lang="nl-BE"/>
           </a:p>
@@ -2995,6 +3024,9 @@
   <p:clrMapOvr>
     <a:masterClrMapping/>
   </p:clrMapOvr>
+  <p:transition spd="slow">
+    <p:cover/>
+  </p:transition>
 </p:sldLayout>
 </file>
 
@@ -3150,7 +3182,7 @@
           <a:p>
             <a:fld id="{9D986570-2C26-4E5F-9D28-4D18F9BAC427}" type="datetimeFigureOut">
               <a:rPr lang="nl-BE" smtClean="0"/>
-              <a:t>1/06/2026</a:t>
+              <a:t>8/06/2026</a:t>
             </a:fld>
             <a:endParaRPr lang="nl-BE"/>
           </a:p>
@@ -3253,6 +3285,9 @@
     <p:sldLayoutId id="2147483682" r:id="rId10"/>
     <p:sldLayoutId id="2147483683" r:id="rId11"/>
   </p:sldLayoutIdLst>
+  <p:transition spd="slow">
+    <p:cover/>
+  </p:transition>
   <p:txStyles>
     <p:titleStyle>
       <a:lvl1pPr algn="l" defTabSz="914400" rtl="0" eaLnBrk="1" latinLnBrk="0" hangingPunct="1">
@@ -3599,129 +3634,6 @@
           <a:chExt cx="0" cy="0"/>
         </a:xfrm>
       </p:grpSpPr>
-      <p:sp>
-        <p:nvSpPr>
-          <p:cNvPr id="2" name="Title 1">
-            <a:extLst>
-              <a:ext uri="{FF2B5EF4-FFF2-40B4-BE49-F238E27FC236}">
-                <a16:creationId xmlns:a16="http://schemas.microsoft.com/office/drawing/2014/main" id="{060B9045-3109-7F3D-3F6E-A237CA6F2463}"/>
-              </a:ext>
-            </a:extLst>
-          </p:cNvPr>
-          <p:cNvSpPr>
-            <a:spLocks noGrp="1"/>
-          </p:cNvSpPr>
-          <p:nvPr>
-            <p:ph type="ctrTitle"/>
-          </p:nvPr>
-        </p:nvSpPr>
-        <p:spPr>
-          <a:xfrm>
-            <a:off x="2431701" y="802299"/>
-            <a:ext cx="8623151" cy="1991144"/>
-          </a:xfrm>
-        </p:spPr>
-        <p:txBody>
-          <a:bodyPr/>
-          <a:lstStyle/>
-          <a:p>
-            <a:pPr algn="ctr"/>
-            <a:r>
-              <a:rPr lang="ce-Cyrl-RU" dirty="0"/>
-              <a:t>Опыт изучения ингушского языка</a:t>
-            </a:r>
-            <a:endParaRPr lang="nl-BE" dirty="0"/>
-          </a:p>
-        </p:txBody>
-      </p:sp>
-      <p:sp>
-        <p:nvSpPr>
-          <p:cNvPr id="3" name="Subtitle 2">
-            <a:extLst>
-              <a:ext uri="{FF2B5EF4-FFF2-40B4-BE49-F238E27FC236}">
-                <a16:creationId xmlns:a16="http://schemas.microsoft.com/office/drawing/2014/main" id="{32680F89-9446-1DF0-18AB-7937879BB419}"/>
-              </a:ext>
-            </a:extLst>
-          </p:cNvPr>
-          <p:cNvSpPr>
-            <a:spLocks noGrp="1"/>
-          </p:cNvSpPr>
-          <p:nvPr>
-            <p:ph type="subTitle" idx="1"/>
-          </p:nvPr>
-        </p:nvSpPr>
-        <p:spPr>
-          <a:xfrm>
-            <a:off x="964642" y="3597310"/>
-            <a:ext cx="10761783" cy="1843853"/>
-          </a:xfrm>
-        </p:spPr>
-        <p:txBody>
-          <a:bodyPr>
-            <a:normAutofit/>
-          </a:bodyPr>
-          <a:lstStyle/>
-          <a:p>
-            <a:pPr algn="ctr"/>
-            <a:r>
-              <a:rPr lang="ce-Cyrl-RU" sz="2800" dirty="0"/>
-              <a:t>ингушскиЕ притчи </a:t>
-            </a:r>
-            <a:br>
-              <a:rPr lang="ce-Cyrl-RU" sz="2800" dirty="0"/>
-            </a:br>
-            <a:r>
-              <a:rPr lang="ce-Cyrl-RU" sz="2800" dirty="0"/>
-              <a:t>с переводом на русский, чеченский и Английский языки, </a:t>
-            </a:r>
-            <a:br>
-              <a:rPr lang="ce-Cyrl-RU" sz="2800" dirty="0"/>
-            </a:br>
-            <a:r>
-              <a:rPr lang="ce-Cyrl-RU" sz="2800" dirty="0"/>
-              <a:t>с грамматическим разбором</a:t>
-            </a:r>
-            <a:endParaRPr lang="nl-BE" sz="2800" dirty="0"/>
-          </a:p>
-        </p:txBody>
-      </p:sp>
-      <p:sp>
-        <p:nvSpPr>
-          <p:cNvPr id="4" name="TextBox 3">
-            <a:extLst>
-              <a:ext uri="{FF2B5EF4-FFF2-40B4-BE49-F238E27FC236}">
-                <a16:creationId xmlns:a16="http://schemas.microsoft.com/office/drawing/2014/main" id="{D6C6C169-9F2F-9B47-D428-23A7B0BB9391}"/>
-              </a:ext>
-            </a:extLst>
-          </p:cNvPr>
-          <p:cNvSpPr txBox="1"/>
-          <p:nvPr/>
-        </p:nvSpPr>
-        <p:spPr>
-          <a:xfrm>
-            <a:off x="372533" y="6299200"/>
-            <a:ext cx="11353892" cy="369332"/>
-          </a:xfrm>
-          <a:prstGeom prst="rect">
-            <a:avLst/>
-          </a:prstGeom>
-          <a:noFill/>
-        </p:spPr>
-        <p:txBody>
-          <a:bodyPr wrap="square" rtlCol="0">
-            <a:spAutoFit/>
-          </a:bodyPr>
-          <a:lstStyle/>
-          <a:p>
-            <a:pPr algn="ctr"/>
-            <a:r>
-              <a:rPr lang="en-US" dirty="0"/>
-              <a:t>@LADUGA-LADOGA</a:t>
-            </a:r>
-            <a:endParaRPr lang="nl-BE" dirty="0"/>
-          </a:p>
-        </p:txBody>
-      </p:sp>
       <p:pic>
         <p:nvPicPr>
           <p:cNvPr id="5" name="Narodnaya_Ingushskaya">
@@ -3740,8 +3652,8 @@
             <p:extLst>
               <p:ext uri="{DAA4B4D4-6D71-4841-9C94-3DE7FCFB9230}">
                 <p14:media xmlns:p14="http://schemas.microsoft.com/office/powerpoint/2010/main" r:embed="rId2">
-                  <p14:trim st="4888" end="122117.9375"/>
-                  <p14:fade in="250" out="1000"/>
+                  <p14:trim st="5602" end="133226.9375"/>
+                  <p14:fade out="1000"/>
                 </p14:media>
               </p:ext>
             </p:extLst>
@@ -3763,6 +3675,129 @@
           </a:prstGeom>
         </p:spPr>
       </p:pic>
+      <p:sp>
+        <p:nvSpPr>
+          <p:cNvPr id="2" name="Title 1">
+            <a:extLst>
+              <a:ext uri="{FF2B5EF4-FFF2-40B4-BE49-F238E27FC236}">
+                <a16:creationId xmlns:a16="http://schemas.microsoft.com/office/drawing/2014/main" id="{060B9045-3109-7F3D-3F6E-A237CA6F2463}"/>
+              </a:ext>
+            </a:extLst>
+          </p:cNvPr>
+          <p:cNvSpPr>
+            <a:spLocks noGrp="1"/>
+          </p:cNvSpPr>
+          <p:nvPr>
+            <p:ph type="ctrTitle"/>
+          </p:nvPr>
+        </p:nvSpPr>
+        <p:spPr>
+          <a:xfrm>
+            <a:off x="2431701" y="802299"/>
+            <a:ext cx="8623151" cy="1991144"/>
+          </a:xfrm>
+        </p:spPr>
+        <p:txBody>
+          <a:bodyPr/>
+          <a:lstStyle/>
+          <a:p>
+            <a:pPr algn="ctr"/>
+            <a:r>
+              <a:rPr lang="ce-Cyrl-RU" dirty="0"/>
+              <a:t>Опыт изучения ингушского языка</a:t>
+            </a:r>
+            <a:endParaRPr lang="nl-BE" dirty="0"/>
+          </a:p>
+        </p:txBody>
+      </p:sp>
+      <p:sp>
+        <p:nvSpPr>
+          <p:cNvPr id="3" name="Subtitle 2">
+            <a:extLst>
+              <a:ext uri="{FF2B5EF4-FFF2-40B4-BE49-F238E27FC236}">
+                <a16:creationId xmlns:a16="http://schemas.microsoft.com/office/drawing/2014/main" id="{32680F89-9446-1DF0-18AB-7937879BB419}"/>
+              </a:ext>
+            </a:extLst>
+          </p:cNvPr>
+          <p:cNvSpPr>
+            <a:spLocks noGrp="1"/>
+          </p:cNvSpPr>
+          <p:nvPr>
+            <p:ph type="subTitle" idx="1"/>
+          </p:nvPr>
+        </p:nvSpPr>
+        <p:spPr>
+          <a:xfrm>
+            <a:off x="964642" y="3597310"/>
+            <a:ext cx="10761783" cy="1843853"/>
+          </a:xfrm>
+        </p:spPr>
+        <p:txBody>
+          <a:bodyPr>
+            <a:normAutofit/>
+          </a:bodyPr>
+          <a:lstStyle/>
+          <a:p>
+            <a:pPr algn="ctr"/>
+            <a:r>
+              <a:rPr lang="ce-Cyrl-RU" sz="2800" dirty="0"/>
+              <a:t>ингушскиЕ притчи </a:t>
+            </a:r>
+            <a:br>
+              <a:rPr lang="ce-Cyrl-RU" sz="2800" dirty="0"/>
+            </a:br>
+            <a:r>
+              <a:rPr lang="ce-Cyrl-RU" sz="2800" dirty="0"/>
+              <a:t>с переводом на русский, чеченский и Английский языки, </a:t>
+            </a:r>
+            <a:br>
+              <a:rPr lang="ce-Cyrl-RU" sz="2800" dirty="0"/>
+            </a:br>
+            <a:r>
+              <a:rPr lang="ce-Cyrl-RU" sz="2800" dirty="0"/>
+              <a:t>с грамматическим разбором</a:t>
+            </a:r>
+            <a:endParaRPr lang="nl-BE" sz="2800" dirty="0"/>
+          </a:p>
+        </p:txBody>
+      </p:sp>
+      <p:sp>
+        <p:nvSpPr>
+          <p:cNvPr id="4" name="TextBox 3">
+            <a:extLst>
+              <a:ext uri="{FF2B5EF4-FFF2-40B4-BE49-F238E27FC236}">
+                <a16:creationId xmlns:a16="http://schemas.microsoft.com/office/drawing/2014/main" id="{D6C6C169-9F2F-9B47-D428-23A7B0BB9391}"/>
+              </a:ext>
+            </a:extLst>
+          </p:cNvPr>
+          <p:cNvSpPr txBox="1"/>
+          <p:nvPr/>
+        </p:nvSpPr>
+        <p:spPr>
+          <a:xfrm>
+            <a:off x="372533" y="6299200"/>
+            <a:ext cx="11353892" cy="369332"/>
+          </a:xfrm>
+          <a:prstGeom prst="rect">
+            <a:avLst/>
+          </a:prstGeom>
+          <a:noFill/>
+        </p:spPr>
+        <p:txBody>
+          <a:bodyPr wrap="square" rtlCol="0">
+            <a:spAutoFit/>
+          </a:bodyPr>
+          <a:lstStyle/>
+          <a:p>
+            <a:pPr algn="ctr"/>
+            <a:r>
+              <a:rPr lang="en-US" dirty="0"/>
+              <a:t>@LADUGA_LADOGA</a:t>
+            </a:r>
+            <a:endParaRPr lang="nl-BE" dirty="0"/>
+          </a:p>
+        </p:txBody>
+      </p:sp>
     </p:spTree>
     <p:extLst>
       <p:ext uri="{BB962C8B-B14F-4D97-AF65-F5344CB8AC3E}">
@@ -3775,12 +3810,12 @@
   </p:clrMapOvr>
   <mc:AlternateContent xmlns:mc="http://schemas.openxmlformats.org/markup-compatibility/2006">
     <mc:Choice xmlns:p14="http://schemas.microsoft.com/office/powerpoint/2010/main" Requires="p14">
-      <p:transition p14:dur="10">
+      <p:transition spd="med" p14:dur="700">
         <p:fade/>
       </p:transition>
     </mc:Choice>
     <mc:Fallback>
-      <p:transition>
+      <p:transition spd="med">
         <p:fade/>
       </p:transition>
     </mc:Fallback>
@@ -3908,7 +3943,12 @@
             <p:ph type="title"/>
           </p:nvPr>
         </p:nvSpPr>
-        <p:spPr/>
+        <p:spPr>
+          <a:xfrm>
+            <a:off x="1451579" y="223737"/>
+            <a:ext cx="9603275" cy="1630018"/>
+          </a:xfrm>
+        </p:spPr>
         <p:txBody>
           <a:bodyPr/>
           <a:lstStyle/>
@@ -3924,6 +3964,13 @@
             <a:r>
               <a:rPr lang="ce-Cyrl-RU" dirty="0"/>
               <a:t>из ингушского фольклора</a:t>
+            </a:r>
+            <a:br>
+              <a:rPr lang="en-US" dirty="0"/>
+            </a:br>
+            <a:r>
+              <a:rPr lang="ce-Cyrl-RU" dirty="0"/>
+              <a:t>И.А. Дахкильгов, 2000г.</a:t>
             </a:r>
             <a:endParaRPr lang="nl-BE" dirty="0"/>
           </a:p>
@@ -3959,8 +4006,79 @@
         </p:blipFill>
         <p:spPr>
           <a:xfrm>
-            <a:off x="5268533" y="2016125"/>
+            <a:off x="6606688" y="1918747"/>
             <a:ext cx="1969259" cy="3449638"/>
+          </a:xfrm>
+          <a:prstGeom prst="rect">
+            <a:avLst/>
+          </a:prstGeom>
+        </p:spPr>
+      </p:pic>
+      <p:pic>
+        <p:nvPicPr>
+          <p:cNvPr id="6" name="Content Placeholder 4">
+            <a:extLst>
+              <a:ext uri="{FF2B5EF4-FFF2-40B4-BE49-F238E27FC236}">
+                <a16:creationId xmlns:a16="http://schemas.microsoft.com/office/drawing/2014/main" id="{6C9EF8C2-2AAC-E58E-BD9A-1ACBC1A7841F}"/>
+              </a:ext>
+            </a:extLst>
+          </p:cNvPr>
+          <p:cNvPicPr>
+            <a:picLocks noChangeAspect="1"/>
+          </p:cNvPicPr>
+          <p:nvPr/>
+        </p:nvPicPr>
+        <p:blipFill>
+          <a:blip r:embed="rId3">
+            <a:extLst>
+              <a:ext uri="{28A0092B-C50C-407E-A947-70E740481C1C}">
+                <a14:useLocalDpi xmlns:a14="http://schemas.microsoft.com/office/drawing/2010/main" val="0"/>
+              </a:ext>
+            </a:extLst>
+          </a:blip>
+          <a:srcRect/>
+          <a:stretch/>
+        </p:blipFill>
+        <p:spPr>
+          <a:xfrm>
+            <a:off x="8728347" y="1918747"/>
+            <a:ext cx="1969259" cy="3449638"/>
+          </a:xfrm>
+          <a:prstGeom prst="rect">
+            <a:avLst/>
+          </a:prstGeom>
+        </p:spPr>
+      </p:pic>
+      <p:pic>
+        <p:nvPicPr>
+          <p:cNvPr id="8" name="Picture 7">
+            <a:extLst>
+              <a:ext uri="{FF2B5EF4-FFF2-40B4-BE49-F238E27FC236}">
+                <a16:creationId xmlns:a16="http://schemas.microsoft.com/office/drawing/2014/main" id="{73DC7B53-5EC4-58F2-9016-E24BFB875014}"/>
+              </a:ext>
+            </a:extLst>
+          </p:cNvPr>
+          <p:cNvPicPr>
+            <a:picLocks noChangeAspect="1"/>
+          </p:cNvPicPr>
+          <p:nvPr/>
+        </p:nvPicPr>
+        <p:blipFill>
+          <a:blip r:embed="rId4">
+            <a:extLst>
+              <a:ext uri="{28A0092B-C50C-407E-A947-70E740481C1C}">
+                <a14:useLocalDpi xmlns:a14="http://schemas.microsoft.com/office/drawing/2010/main" val="0"/>
+              </a:ext>
+            </a:extLst>
+          </a:blip>
+          <a:stretch>
+            <a:fillRect/>
+          </a:stretch>
+        </p:blipFill>
+        <p:spPr>
+          <a:xfrm>
+            <a:off x="1874912" y="1918747"/>
+            <a:ext cx="3011997" cy="3449638"/>
           </a:xfrm>
           <a:prstGeom prst="rect">
             <a:avLst/>
@@ -3978,265 +4096,230 @@
     <a:masterClrMapping/>
   </p:clrMapOvr>
   <mc:AlternateContent xmlns:mc="http://schemas.openxmlformats.org/markup-compatibility/2006">
-    <mc:Choice xmlns:p14="http://schemas.microsoft.com/office/powerpoint/2010/main" Requires="p14">
-      <p:transition p14:dur="10">
-        <p:fade/>
+    <mc:Choice xmlns:p159="http://schemas.microsoft.com/office/powerpoint/2015/09/main" Requires="p159">
+      <p:transition xmlns:p14="http://schemas.microsoft.com/office/powerpoint/2010/main" spd="slow" p14:dur="2000">
+        <p159:morph option="byObject"/>
       </p:transition>
     </mc:Choice>
     <mc:Fallback>
-      <p:transition>
+      <p:transition spd="slow">
         <p:fade/>
       </p:transition>
     </mc:Fallback>
   </mc:AlternateContent>
-</p:sld>
-</file>
-
-<file path=ppt/slides/slide3.xml><?xml version="1.0" encoding="utf-8"?>
-<p:sld xmlns:a="http://schemas.openxmlformats.org/drawingml/2006/main" xmlns:r="http://schemas.openxmlformats.org/officeDocument/2006/relationships" xmlns:p="http://schemas.openxmlformats.org/presentationml/2006/main">
-  <p:cSld>
-    <p:spTree>
-      <p:nvGrpSpPr>
-        <p:cNvPr id="1" name="">
-          <a:extLst>
-            <a:ext uri="{FF2B5EF4-FFF2-40B4-BE49-F238E27FC236}">
-              <a16:creationId xmlns:a16="http://schemas.microsoft.com/office/drawing/2014/main" id="{FECEE033-97A8-B883-D2B8-4E030A975B2B}"/>
-            </a:ext>
-          </a:extLst>
-        </p:cNvPr>
-        <p:cNvGrpSpPr/>
-        <p:nvPr/>
-      </p:nvGrpSpPr>
-      <p:grpSpPr>
-        <a:xfrm>
-          <a:off x="0" y="0"/>
-          <a:ext cx="0" cy="0"/>
-          <a:chOff x="0" y="0"/>
-          <a:chExt cx="0" cy="0"/>
-        </a:xfrm>
-      </p:grpSpPr>
-      <p:sp>
-        <p:nvSpPr>
-          <p:cNvPr id="2" name="Title 1">
-            <a:extLst>
-              <a:ext uri="{FF2B5EF4-FFF2-40B4-BE49-F238E27FC236}">
-                <a16:creationId xmlns:a16="http://schemas.microsoft.com/office/drawing/2014/main" id="{3B5AD15D-785B-DD1A-AD6D-144FBBCBEDB8}"/>
-              </a:ext>
-            </a:extLst>
-          </p:cNvPr>
-          <p:cNvSpPr>
-            <a:spLocks noGrp="1"/>
-          </p:cNvSpPr>
-          <p:nvPr>
-            <p:ph type="title"/>
-          </p:nvPr>
-        </p:nvSpPr>
-        <p:spPr/>
-        <p:txBody>
-          <a:bodyPr/>
-          <a:lstStyle/>
-          <a:p>
-            <a:pPr algn="ctr"/>
-            <a:r>
-              <a:rPr lang="ce-Cyrl-RU" dirty="0"/>
-              <a:t>И.А. Дахкильгов</a:t>
-            </a:r>
-            <a:br>
-              <a:rPr lang="ce-Cyrl-RU" dirty="0"/>
-            </a:br>
-            <a:r>
-              <a:rPr lang="ce-Cyrl-RU" dirty="0"/>
-              <a:t>2000 г.</a:t>
-            </a:r>
-            <a:endParaRPr lang="nl-BE" dirty="0"/>
-          </a:p>
-        </p:txBody>
-      </p:sp>
-      <p:pic>
-        <p:nvPicPr>
-          <p:cNvPr id="5" name="Content Placeholder 4">
-            <a:extLst>
-              <a:ext uri="{FF2B5EF4-FFF2-40B4-BE49-F238E27FC236}">
-                <a16:creationId xmlns:a16="http://schemas.microsoft.com/office/drawing/2014/main" id="{3B24FC5C-AD12-2F81-61DA-9CC1322DB796}"/>
-              </a:ext>
-            </a:extLst>
-          </p:cNvPr>
-          <p:cNvPicPr>
-            <a:picLocks noGrp="1" noChangeAspect="1"/>
-          </p:cNvPicPr>
-          <p:nvPr>
-            <p:ph idx="1"/>
-          </p:nvPr>
-        </p:nvPicPr>
-        <p:blipFill>
-          <a:blip r:embed="rId2">
-            <a:extLst>
-              <a:ext uri="{28A0092B-C50C-407E-A947-70E740481C1C}">
-                <a14:useLocalDpi xmlns:a14="http://schemas.microsoft.com/office/drawing/2010/main" val="0"/>
-              </a:ext>
-            </a:extLst>
-          </a:blip>
-          <a:srcRect/>
-          <a:stretch/>
-        </p:blipFill>
-        <p:spPr>
-          <a:xfrm>
-            <a:off x="5268533" y="2016125"/>
-            <a:ext cx="1969259" cy="3449638"/>
-          </a:xfrm>
-          <a:prstGeom prst="rect">
-            <a:avLst/>
-          </a:prstGeom>
-        </p:spPr>
-      </p:pic>
-    </p:spTree>
-    <p:extLst>
-      <p:ext uri="{BB962C8B-B14F-4D97-AF65-F5344CB8AC3E}">
-        <p14:creationId xmlns:p14="http://schemas.microsoft.com/office/powerpoint/2010/main" val="551232763"/>
-      </p:ext>
-    </p:extLst>
-  </p:cSld>
-  <p:clrMapOvr>
-    <a:masterClrMapping/>
-  </p:clrMapOvr>
-  <mc:AlternateContent xmlns:mc="http://schemas.openxmlformats.org/markup-compatibility/2006">
-    <mc:Choice xmlns:p14="http://schemas.microsoft.com/office/powerpoint/2010/main" Requires="p14">
-      <p:transition p14:dur="10">
-        <p:fade/>
-      </p:transition>
-    </mc:Choice>
-    <mc:Fallback>
-      <p:transition>
-        <p:fade/>
-      </p:transition>
-    </mc:Fallback>
-  </mc:AlternateContent>
-</p:sld>
-</file>
-
-<file path=ppt/slides/slide4.xml><?xml version="1.0" encoding="utf-8"?>
-<p:sld xmlns:a="http://schemas.openxmlformats.org/drawingml/2006/main" xmlns:r="http://schemas.openxmlformats.org/officeDocument/2006/relationships" xmlns:p="http://schemas.openxmlformats.org/presentationml/2006/main">
-  <p:cSld>
-    <p:spTree>
-      <p:nvGrpSpPr>
-        <p:cNvPr id="1" name="">
-          <a:extLst>
-            <a:ext uri="{FF2B5EF4-FFF2-40B4-BE49-F238E27FC236}">
-              <a16:creationId xmlns:a16="http://schemas.microsoft.com/office/drawing/2014/main" id="{33A53215-6001-DDB8-2CDF-EE8CE1FE19F5}"/>
-            </a:ext>
-          </a:extLst>
-        </p:cNvPr>
-        <p:cNvGrpSpPr/>
-        <p:nvPr/>
-      </p:nvGrpSpPr>
-      <p:grpSpPr>
-        <a:xfrm>
-          <a:off x="0" y="0"/>
-          <a:ext cx="0" cy="0"/>
-          <a:chOff x="0" y="0"/>
-          <a:chExt cx="0" cy="0"/>
-        </a:xfrm>
-      </p:grpSpPr>
-      <p:sp>
-        <p:nvSpPr>
-          <p:cNvPr id="2" name="Title 1">
-            <a:extLst>
-              <a:ext uri="{FF2B5EF4-FFF2-40B4-BE49-F238E27FC236}">
-                <a16:creationId xmlns:a16="http://schemas.microsoft.com/office/drawing/2014/main" id="{88561DC7-DBC0-9898-8327-0D69CFB82425}"/>
-              </a:ext>
-            </a:extLst>
-          </p:cNvPr>
-          <p:cNvSpPr>
-            <a:spLocks noGrp="1"/>
-          </p:cNvSpPr>
-          <p:nvPr>
-            <p:ph type="title"/>
-          </p:nvPr>
-        </p:nvSpPr>
-        <p:spPr/>
-        <p:txBody>
-          <a:bodyPr/>
-          <a:lstStyle/>
-          <a:p>
-            <a:pPr algn="ctr"/>
-            <a:r>
-              <a:rPr lang="ru-RU" dirty="0"/>
-              <a:t>Х</a:t>
-            </a:r>
-            <a:r>
-              <a:rPr lang="ce-Cyrl-RU" dirty="0"/>
-              <a:t>ьехаме дувцараш</a:t>
-            </a:r>
-            <a:br>
-              <a:rPr lang="ce-Cyrl-RU" dirty="0"/>
-            </a:br>
-            <a:r>
-              <a:rPr lang="ce-Cyrl-RU" dirty="0"/>
-              <a:t>поучительные рассказы-притчи</a:t>
-            </a:r>
-            <a:endParaRPr lang="nl-BE" dirty="0"/>
-          </a:p>
-        </p:txBody>
-      </p:sp>
-      <p:pic>
-        <p:nvPicPr>
-          <p:cNvPr id="5" name="Content Placeholder 4">
-            <a:extLst>
-              <a:ext uri="{FF2B5EF4-FFF2-40B4-BE49-F238E27FC236}">
-                <a16:creationId xmlns:a16="http://schemas.microsoft.com/office/drawing/2014/main" id="{A1D89F0A-A9F7-E16F-1316-EA31FF2E3DD6}"/>
-              </a:ext>
-            </a:extLst>
-          </p:cNvPr>
-          <p:cNvPicPr>
-            <a:picLocks noGrp="1" noChangeAspect="1"/>
-          </p:cNvPicPr>
-          <p:nvPr>
-            <p:ph idx="1"/>
-          </p:nvPr>
-        </p:nvPicPr>
-        <p:blipFill>
-          <a:blip r:embed="rId2">
-            <a:extLst>
-              <a:ext uri="{28A0092B-C50C-407E-A947-70E740481C1C}">
-                <a14:useLocalDpi xmlns:a14="http://schemas.microsoft.com/office/drawing/2010/main" val="0"/>
-              </a:ext>
-            </a:extLst>
-          </a:blip>
-          <a:srcRect/>
-          <a:stretch/>
-        </p:blipFill>
-        <p:spPr>
-          <a:xfrm>
-            <a:off x="5268533" y="2016125"/>
-            <a:ext cx="1969259" cy="3449638"/>
-          </a:xfrm>
-          <a:prstGeom prst="rect">
-            <a:avLst/>
-          </a:prstGeom>
-        </p:spPr>
-      </p:pic>
-    </p:spTree>
-    <p:extLst>
-      <p:ext uri="{BB962C8B-B14F-4D97-AF65-F5344CB8AC3E}">
-        <p14:creationId xmlns:p14="http://schemas.microsoft.com/office/powerpoint/2010/main" val="1414063397"/>
-      </p:ext>
-    </p:extLst>
-  </p:cSld>
-  <p:clrMapOvr>
-    <a:masterClrMapping/>
-  </p:clrMapOvr>
-  <mc:AlternateContent xmlns:mc="http://schemas.openxmlformats.org/markup-compatibility/2006">
-    <mc:Choice xmlns:p14="http://schemas.microsoft.com/office/powerpoint/2010/main" Requires="p14">
-      <p:transition p14:dur="10">
-        <p:fade/>
-      </p:transition>
-    </mc:Choice>
-    <mc:Fallback>
-      <p:transition>
-        <p:fade/>
-      </p:transition>
-    </mc:Fallback>
-  </mc:AlternateContent>
+  <p:timing>
+    <p:tnLst>
+      <p:par>
+        <p:cTn id="1" dur="indefinite" restart="never" nodeType="tmRoot">
+          <p:childTnLst>
+            <p:seq concurrent="1" nextAc="seek">
+              <p:cTn id="2" dur="indefinite" nodeType="mainSeq">
+                <p:childTnLst>
+                  <p:par>
+                    <p:cTn id="3" fill="hold">
+                      <p:stCondLst>
+                        <p:cond delay="indefinite"/>
+                        <p:cond evt="onBegin" delay="0">
+                          <p:tn val="2"/>
+                        </p:cond>
+                      </p:stCondLst>
+                      <p:childTnLst>
+                        <p:par>
+                          <p:cTn id="4" fill="hold">
+                            <p:stCondLst>
+                              <p:cond delay="0"/>
+                            </p:stCondLst>
+                            <p:childTnLst>
+                              <p:par>
+                                <p:cTn id="5" presetID="55" presetClass="entr" presetSubtype="0" fill="hold" nodeType="withEffect">
+                                  <p:stCondLst>
+                                    <p:cond delay="0"/>
+                                  </p:stCondLst>
+                                  <p:childTnLst>
+                                    <p:set>
+                                      <p:cBhvr>
+                                        <p:cTn id="6" dur="1" fill="hold">
+                                          <p:stCondLst>
+                                            <p:cond delay="0"/>
+                                          </p:stCondLst>
+                                        </p:cTn>
+                                        <p:tgtEl>
+                                          <p:spTgt spid="5"/>
+                                        </p:tgtEl>
+                                        <p:attrNameLst>
+                                          <p:attrName>style.visibility</p:attrName>
+                                        </p:attrNameLst>
+                                      </p:cBhvr>
+                                      <p:to>
+                                        <p:strVal val="visible"/>
+                                      </p:to>
+                                    </p:set>
+                                    <p:anim calcmode="lin" valueType="num">
+                                      <p:cBhvr>
+                                        <p:cTn id="7" dur="1000" fill="hold"/>
+                                        <p:tgtEl>
+                                          <p:spTgt spid="5"/>
+                                        </p:tgtEl>
+                                        <p:attrNameLst>
+                                          <p:attrName>ppt_w</p:attrName>
+                                        </p:attrNameLst>
+                                      </p:cBhvr>
+                                      <p:tavLst>
+                                        <p:tav tm="0">
+                                          <p:val>
+                                            <p:strVal val="#ppt_w*0.70"/>
+                                          </p:val>
+                                        </p:tav>
+                                        <p:tav tm="100000">
+                                          <p:val>
+                                            <p:strVal val="#ppt_w"/>
+                                          </p:val>
+                                        </p:tav>
+                                      </p:tavLst>
+                                    </p:anim>
+                                    <p:anim calcmode="lin" valueType="num">
+                                      <p:cBhvr>
+                                        <p:cTn id="8" dur="1000" fill="hold"/>
+                                        <p:tgtEl>
+                                          <p:spTgt spid="5"/>
+                                        </p:tgtEl>
+                                        <p:attrNameLst>
+                                          <p:attrName>ppt_h</p:attrName>
+                                        </p:attrNameLst>
+                                      </p:cBhvr>
+                                      <p:tavLst>
+                                        <p:tav tm="0">
+                                          <p:val>
+                                            <p:strVal val="#ppt_h"/>
+                                          </p:val>
+                                        </p:tav>
+                                        <p:tav tm="100000">
+                                          <p:val>
+                                            <p:strVal val="#ppt_h"/>
+                                          </p:val>
+                                        </p:tav>
+                                      </p:tavLst>
+                                    </p:anim>
+                                    <p:animEffect transition="in" filter="fade">
+                                      <p:cBhvr>
+                                        <p:cTn id="9" dur="1000"/>
+                                        <p:tgtEl>
+                                          <p:spTgt spid="5"/>
+                                        </p:tgtEl>
+                                      </p:cBhvr>
+                                    </p:animEffect>
+                                  </p:childTnLst>
+                                </p:cTn>
+                              </p:par>
+                              <p:par>
+                                <p:cTn id="10" presetID="55" presetClass="entr" presetSubtype="0" fill="hold" nodeType="withEffect">
+                                  <p:stCondLst>
+                                    <p:cond delay="0"/>
+                                  </p:stCondLst>
+                                  <p:childTnLst>
+                                    <p:set>
+                                      <p:cBhvr>
+                                        <p:cTn id="11" dur="1" fill="hold">
+                                          <p:stCondLst>
+                                            <p:cond delay="0"/>
+                                          </p:stCondLst>
+                                        </p:cTn>
+                                        <p:tgtEl>
+                                          <p:spTgt spid="6"/>
+                                        </p:tgtEl>
+                                        <p:attrNameLst>
+                                          <p:attrName>style.visibility</p:attrName>
+                                        </p:attrNameLst>
+                                      </p:cBhvr>
+                                      <p:to>
+                                        <p:strVal val="visible"/>
+                                      </p:to>
+                                    </p:set>
+                                    <p:anim calcmode="lin" valueType="num">
+                                      <p:cBhvr>
+                                        <p:cTn id="12" dur="1000" fill="hold"/>
+                                        <p:tgtEl>
+                                          <p:spTgt spid="6"/>
+                                        </p:tgtEl>
+                                        <p:attrNameLst>
+                                          <p:attrName>ppt_w</p:attrName>
+                                        </p:attrNameLst>
+                                      </p:cBhvr>
+                                      <p:tavLst>
+                                        <p:tav tm="0">
+                                          <p:val>
+                                            <p:strVal val="#ppt_w*0.70"/>
+                                          </p:val>
+                                        </p:tav>
+                                        <p:tav tm="100000">
+                                          <p:val>
+                                            <p:strVal val="#ppt_w"/>
+                                          </p:val>
+                                        </p:tav>
+                                      </p:tavLst>
+                                    </p:anim>
+                                    <p:anim calcmode="lin" valueType="num">
+                                      <p:cBhvr>
+                                        <p:cTn id="13" dur="1000" fill="hold"/>
+                                        <p:tgtEl>
+                                          <p:spTgt spid="6"/>
+                                        </p:tgtEl>
+                                        <p:attrNameLst>
+                                          <p:attrName>ppt_h</p:attrName>
+                                        </p:attrNameLst>
+                                      </p:cBhvr>
+                                      <p:tavLst>
+                                        <p:tav tm="0">
+                                          <p:val>
+                                            <p:strVal val="#ppt_h"/>
+                                          </p:val>
+                                        </p:tav>
+                                        <p:tav tm="100000">
+                                          <p:val>
+                                            <p:strVal val="#ppt_h"/>
+                                          </p:val>
+                                        </p:tav>
+                                      </p:tavLst>
+                                    </p:anim>
+                                    <p:animEffect transition="in" filter="fade">
+                                      <p:cBhvr>
+                                        <p:cTn id="14" dur="1000"/>
+                                        <p:tgtEl>
+                                          <p:spTgt spid="6"/>
+                                        </p:tgtEl>
+                                      </p:cBhvr>
+                                    </p:animEffect>
+                                  </p:childTnLst>
+                                </p:cTn>
+                              </p:par>
+                            </p:childTnLst>
+                          </p:cTn>
+                        </p:par>
+                      </p:childTnLst>
+                    </p:cTn>
+                  </p:par>
+                </p:childTnLst>
+              </p:cTn>
+              <p:prevCondLst>
+                <p:cond evt="onPrev" delay="0">
+                  <p:tgtEl>
+                    <p:sldTgt/>
+                  </p:tgtEl>
+                </p:cond>
+              </p:prevCondLst>
+              <p:nextCondLst>
+                <p:cond evt="onNext" delay="0">
+                  <p:tgtEl>
+                    <p:sldTgt/>
+                  </p:tgtEl>
+                </p:cond>
+              </p:nextCondLst>
+            </p:seq>
+          </p:childTnLst>
+        </p:cTn>
+      </p:par>
+    </p:tnLst>
+  </p:timing>
 </p:sld>
 </file>
 
